--- a/mandate-ledger-demo.pptx
+++ b/mandate-ledger-demo.pptx
@@ -5354,8 +5354,8 @@
         </p:blipFill>
         <p:spPr>
           <a:xfrm>
-            <a:off x="7955280" y="2835712"/>
-            <a:ext cx="3703320" cy="2603896"/>
+            <a:off x="8774900" y="1941640"/>
+            <a:ext cx="2064000" cy="4392000"/>
           </a:xfrm>
           <a:prstGeom prst="rect">
             <a:avLst/>
